--- a/classes/parte-6-analisis-de-malware/158-emulacion-y-unpacking-automatizado/clase-158-presentacion.pptx
+++ b/classes/parte-6-analisis-de-malware/158-emulacion-y-unpacking-automatizado/clase-158-presentacion.pptx
@@ -17,6 +17,9 @@
     <p:sldId id="265" r:id="rId16"/>
     <p:sldId id="266" r:id="rId17"/>
     <p:sldId id="267" r:id="rId18"/>
+    <p:sldId id="268" r:id="rId19"/>
+    <p:sldId id="269" r:id="rId20"/>
+    <p:sldId id="270" r:id="rId21"/>
   </p:sldIdLst>
   <p:sldSz cx="9144000" cy="6858000" type="screen4x3"/>
   <p:notesSz cx="6858000" cy="9144000"/>
@@ -3198,7 +3201,7 @@
                   <a:srgbClr val="0B3D2E"/>
                 </a:solidFill>
               </a:rPr>
-              <a:t>⚠️ Errores comunes</a:t>
+              <a:t>✍️ Ejercicios</a:t>
             </a:r>
           </a:p>
         </p:txBody>
@@ -3236,67 +3239,82 @@
                   <a:srgbClr val="22282E"/>
                 </a:solidFill>
               </a:rPr>
-              <a:t>•  La emulación falla en una API — Falta stub/hook de esa API; impleméntalo o usa Qiling</a:t>
-            </a:r>
-          </a:p>
-          <a:p>
-            <a:pPr>
-              <a:spcAft>
-                <a:spcPts val="600"/>
-              </a:spcAft>
-            </a:pPr>
-            <a:r>
-              <a:rPr sz="1500">
-                <a:solidFill>
-                  <a:srgbClr val="22282E"/>
-                </a:solidFill>
-              </a:rPr>
-              <a:t>•  Registros/pila mal inicializados — Emulas una función sin su contexto; fija args y ESP/RSP</a:t>
-            </a:r>
-          </a:p>
-          <a:p>
-            <a:pPr>
-              <a:spcAft>
-                <a:spcPts val="600"/>
-              </a:spcAft>
-            </a:pPr>
-            <a:r>
-              <a:rPr sz="1500">
-                <a:solidFill>
-                  <a:srgbClr val="22282E"/>
-                </a:solidFill>
-              </a:rPr>
-              <a:t>•  Config sale corrupta — Rango de direcciones incorrecto; ajusta inicio/fin y base</a:t>
-            </a:r>
-          </a:p>
-          <a:p>
-            <a:pPr>
-              <a:spcAft>
-                <a:spcPts val="600"/>
-              </a:spcAft>
-            </a:pPr>
-            <a:r>
-              <a:rPr sz="1500">
-                <a:solidFill>
-                  <a:srgbClr val="22282E"/>
-                </a:solidFill>
-              </a:rPr>
-              <a:t>•  Hashes no coinciden — Algoritmo de hash mal identificado; verifícalo en el código</a:t>
-            </a:r>
-          </a:p>
-          <a:p>
-            <a:pPr>
-              <a:spcAft>
-                <a:spcPts val="600"/>
-              </a:spcAft>
-            </a:pPr>
-            <a:r>
-              <a:rPr sz="1500">
-                <a:solidFill>
-                  <a:srgbClr val="22282E"/>
-                </a:solidFill>
-              </a:rPr>
-              <a:t>•  Extractor solo sirve para 1 muestra — Codificaste offsets fijos; parametriza por patrones</a:t>
+              <a:t>•  Explica cuándo prefieres emular una función en vez de depurar la muestra.</a:t>
+            </a:r>
+          </a:p>
+          <a:p>
+            <a:pPr>
+              <a:spcAft>
+                <a:spcPts val="600"/>
+              </a:spcAft>
+            </a:pPr>
+            <a:r>
+              <a:rPr sz="1500">
+                <a:solidFill>
+                  <a:srgbClr val="22282E"/>
+                </a:solidFill>
+              </a:rPr>
+              <a:t>•  Emula una rutina XOR con Unicorn y recupera su salida.</a:t>
+            </a:r>
+          </a:p>
+          <a:p>
+            <a:pPr>
+              <a:spcAft>
+                <a:spcPts val="600"/>
+              </a:spcAft>
+            </a:pPr>
+            <a:r>
+              <a:rPr sz="1500">
+                <a:solidFill>
+                  <a:srgbClr val="22282E"/>
+                </a:solidFill>
+              </a:rPr>
+              <a:t>•  Resuelve API hashing precomputando hashes de APIs comunes.</a:t>
+            </a:r>
+          </a:p>
+          <a:p>
+            <a:pPr>
+              <a:spcAft>
+                <a:spcPts val="600"/>
+              </a:spcAft>
+            </a:pPr>
+            <a:r>
+              <a:rPr sz="1500">
+                <a:solidFill>
+                  <a:srgbClr val="22282E"/>
+                </a:solidFill>
+              </a:rPr>
+              <a:t>•  Usa Qiling/Speakeasy para capturar las APIs de un unpacker.</a:t>
+            </a:r>
+          </a:p>
+          <a:p>
+            <a:pPr>
+              <a:spcAft>
+                <a:spcPts val="600"/>
+              </a:spcAft>
+            </a:pPr>
+            <a:r>
+              <a:rPr sz="1500">
+                <a:solidFill>
+                  <a:srgbClr val="22282E"/>
+                </a:solidFill>
+              </a:rPr>
+              <a:t>•  Escribe un extractor de config que devuelva JSON.</a:t>
+            </a:r>
+          </a:p>
+          <a:p>
+            <a:pPr>
+              <a:spcAft>
+                <a:spcPts val="600"/>
+              </a:spcAft>
+            </a:pPr>
+            <a:r>
+              <a:rPr sz="1500">
+                <a:solidFill>
+                  <a:srgbClr val="22282E"/>
+                </a:solidFill>
+              </a:rPr>
+              <a:t>•  Integra el extractor en un mini-pipeline de triaje por lotes.</a:t>
             </a:r>
           </a:p>
         </p:txBody>
@@ -3347,7 +3365,7 @@
                   <a:srgbClr val="0B3D2E"/>
                 </a:solidFill>
               </a:rPr>
-              <a:t>❓ Preguntas frecuentes</a:t>
+              <a:t>📝 Reto verificable</a:t>
             </a:r>
           </a:p>
         </p:txBody>
@@ -3385,37 +3403,22 @@
                   <a:srgbClr val="22282E"/>
                 </a:solidFill>
               </a:rPr>
-              <a:t>•  ❓ ¿Emulación reemplaza al desensamblado? No; lo complementa. Primero localizas la rutina con análisis estático y luego la emulas para obtener el resultado sin ejecutar todo el malware.</a:t>
-            </a:r>
-          </a:p>
-          <a:p>
-            <a:pPr>
-              <a:spcAft>
-                <a:spcPts val="600"/>
-              </a:spcAft>
-            </a:pPr>
-            <a:r>
-              <a:rPr sz="1500">
-                <a:solidFill>
-                  <a:srgbClr val="22282E"/>
-                </a:solidFill>
-              </a:rPr>
-              <a:t>•  ❓ ¿Es 100% segura la emulación? Más segura que ejecutar, pero frameworks con soporte de SO pueden hacer syscalls reales; mantén el aislamiento.</a:t>
-            </a:r>
-          </a:p>
-          <a:p>
-            <a:pPr>
-              <a:spcAft>
-                <a:spcPts val="600"/>
-              </a:spcAft>
-            </a:pPr>
-            <a:r>
-              <a:rPr sz="1500">
-                <a:solidFill>
-                  <a:srgbClr val="22282E"/>
-                </a:solidFill>
-              </a:rPr>
-              <a:t>•  ❓ ¿Vale la pena automatizar un extractor? Sí cuando una familia es prevalente: procesar cientos de muestras a mano no escala; un extractor entrega IOCs en segundos.</a:t>
+              <a:t>•  Entrega un extractor de configuración para una familia que, por emulación, recupere la config (dominios/clave/intervalo) de al menos 3 muestras distintas de esa familia, con salida en JSON.</a:t>
+            </a:r>
+          </a:p>
+          <a:p>
+            <a:pPr>
+              <a:spcAft>
+                <a:spcPts val="600"/>
+              </a:spcAft>
+            </a:pPr>
+            <a:r>
+              <a:rPr sz="1500">
+                <a:solidFill>
+                  <a:srgbClr val="22282E"/>
+                </a:solidFill>
+              </a:rPr>
+              <a:t>•  Criterio de aceptación: el script corre sin depuración manual y produce la config correcta para 3+ muestras de la familia, verificable contra el análisis manual de una de ellas.</a:t>
             </a:r>
           </a:p>
         </p:txBody>
@@ -3466,7 +3469,7 @@
                   <a:srgbClr val="0B3D2E"/>
                 </a:solidFill>
               </a:rPr>
-              <a:t>🔗 Referencias</a:t>
+              <a:t>⚠️ Errores comunes</a:t>
             </a:r>
           </a:p>
         </p:txBody>
@@ -3504,6 +3507,274 @@
                   <a:srgbClr val="22282E"/>
                 </a:solidFill>
               </a:rPr>
+              <a:t>•  La emulación falla en una API — Falta stub/hook de esa API; impleméntalo o usa Qiling</a:t>
+            </a:r>
+          </a:p>
+          <a:p>
+            <a:pPr>
+              <a:spcAft>
+                <a:spcPts val="600"/>
+              </a:spcAft>
+            </a:pPr>
+            <a:r>
+              <a:rPr sz="1500">
+                <a:solidFill>
+                  <a:srgbClr val="22282E"/>
+                </a:solidFill>
+              </a:rPr>
+              <a:t>•  Registros/pila mal inicializados — Emulas una función sin su contexto; fija args y ESP/RSP</a:t>
+            </a:r>
+          </a:p>
+          <a:p>
+            <a:pPr>
+              <a:spcAft>
+                <a:spcPts val="600"/>
+              </a:spcAft>
+            </a:pPr>
+            <a:r>
+              <a:rPr sz="1500">
+                <a:solidFill>
+                  <a:srgbClr val="22282E"/>
+                </a:solidFill>
+              </a:rPr>
+              <a:t>•  Config sale corrupta — Rango de direcciones incorrecto; ajusta inicio/fin y base</a:t>
+            </a:r>
+          </a:p>
+          <a:p>
+            <a:pPr>
+              <a:spcAft>
+                <a:spcPts val="600"/>
+              </a:spcAft>
+            </a:pPr>
+            <a:r>
+              <a:rPr sz="1500">
+                <a:solidFill>
+                  <a:srgbClr val="22282E"/>
+                </a:solidFill>
+              </a:rPr>
+              <a:t>•  Hashes no coinciden — Algoritmo de hash mal identificado; verifícalo en el código</a:t>
+            </a:r>
+          </a:p>
+          <a:p>
+            <a:pPr>
+              <a:spcAft>
+                <a:spcPts val="600"/>
+              </a:spcAft>
+            </a:pPr>
+            <a:r>
+              <a:rPr sz="1500">
+                <a:solidFill>
+                  <a:srgbClr val="22282E"/>
+                </a:solidFill>
+              </a:rPr>
+              <a:t>•  Extractor solo sirve para 1 muestra — Codificaste offsets fijos; parametriza por patrones</a:t>
+            </a:r>
+          </a:p>
+        </p:txBody>
+      </p:sp>
+    </p:spTree>
+  </p:cSld>
+  <p:clrMapOvr>
+    <a:masterClrMapping/>
+  </p:clrMapOvr>
+</p:sld>
+</file>
+
+<file path=ppt/slides/slide13.xml><?xml version="1.0" encoding="utf-8"?>
+<p:sld xmlns:a="http://schemas.openxmlformats.org/drawingml/2006/main" xmlns:p="http://schemas.openxmlformats.org/presentationml/2006/main" xmlns:r="http://schemas.openxmlformats.org/officeDocument/2006/relationships">
+  <p:cSld>
+    <p:spTree>
+      <p:nvGrpSpPr>
+        <p:cNvPr id="1" name=""/>
+        <p:cNvGrpSpPr/>
+        <p:nvPr/>
+      </p:nvGrpSpPr>
+      <p:grpSpPr/>
+      <p:sp>
+        <p:nvSpPr>
+          <p:cNvPr id="2" name="TextBox 1"/>
+          <p:cNvSpPr txBox="1"/>
+          <p:nvPr/>
+        </p:nvSpPr>
+        <p:spPr>
+          <a:xfrm>
+            <a:off x="457200" y="320040"/>
+            <a:ext cx="8229600" cy="822960"/>
+          </a:xfrm>
+          <a:prstGeom prst="rect">
+            <a:avLst/>
+          </a:prstGeom>
+          <a:noFill/>
+        </p:spPr>
+        <p:txBody>
+          <a:bodyPr wrap="square">
+            <a:spAutoFit/>
+          </a:bodyPr>
+          <a:lstStyle/>
+          <a:p>
+            <a:r>
+              <a:rPr sz="2600" b="1">
+                <a:solidFill>
+                  <a:srgbClr val="0B3D2E"/>
+                </a:solidFill>
+              </a:rPr>
+              <a:t>❓ Preguntas frecuentes</a:t>
+            </a:r>
+          </a:p>
+        </p:txBody>
+      </p:sp>
+      <p:sp>
+        <p:nvSpPr>
+          <p:cNvPr id="3" name="TextBox 2"/>
+          <p:cNvSpPr txBox="1"/>
+          <p:nvPr/>
+        </p:nvSpPr>
+        <p:spPr>
+          <a:xfrm>
+            <a:off x="457200" y="1280160"/>
+            <a:ext cx="8229600" cy="4937760"/>
+          </a:xfrm>
+          <a:prstGeom prst="rect">
+            <a:avLst/>
+          </a:prstGeom>
+          <a:noFill/>
+        </p:spPr>
+        <p:txBody>
+          <a:bodyPr wrap="square">
+            <a:spAutoFit/>
+          </a:bodyPr>
+          <a:lstStyle/>
+          <a:p>
+            <a:pPr>
+              <a:spcAft>
+                <a:spcPts val="600"/>
+              </a:spcAft>
+            </a:pPr>
+            <a:r>
+              <a:rPr sz="1500">
+                <a:solidFill>
+                  <a:srgbClr val="22282E"/>
+                </a:solidFill>
+              </a:rPr>
+              <a:t>•  ❓ ¿Emulación reemplaza al desensamblado? No; lo complementa. Primero localizas la rutina con análisis estático y luego la emulas para obtener el resultado sin ejecutar todo el malware.</a:t>
+            </a:r>
+          </a:p>
+          <a:p>
+            <a:pPr>
+              <a:spcAft>
+                <a:spcPts val="600"/>
+              </a:spcAft>
+            </a:pPr>
+            <a:r>
+              <a:rPr sz="1500">
+                <a:solidFill>
+                  <a:srgbClr val="22282E"/>
+                </a:solidFill>
+              </a:rPr>
+              <a:t>•  ❓ ¿Es 100% segura la emulación? Más segura que ejecutar, pero frameworks con soporte de SO pueden hacer syscalls reales; mantén el aislamiento.</a:t>
+            </a:r>
+          </a:p>
+          <a:p>
+            <a:pPr>
+              <a:spcAft>
+                <a:spcPts val="600"/>
+              </a:spcAft>
+            </a:pPr>
+            <a:r>
+              <a:rPr sz="1500">
+                <a:solidFill>
+                  <a:srgbClr val="22282E"/>
+                </a:solidFill>
+              </a:rPr>
+              <a:t>•  ❓ ¿Vale la pena automatizar un extractor? Sí cuando una familia es prevalente: procesar cientos de muestras a mano no escala; un extractor entrega IOCs en segundos.</a:t>
+            </a:r>
+          </a:p>
+        </p:txBody>
+      </p:sp>
+    </p:spTree>
+  </p:cSld>
+  <p:clrMapOvr>
+    <a:masterClrMapping/>
+  </p:clrMapOvr>
+</p:sld>
+</file>
+
+<file path=ppt/slides/slide14.xml><?xml version="1.0" encoding="utf-8"?>
+<p:sld xmlns:a="http://schemas.openxmlformats.org/drawingml/2006/main" xmlns:p="http://schemas.openxmlformats.org/presentationml/2006/main" xmlns:r="http://schemas.openxmlformats.org/officeDocument/2006/relationships">
+  <p:cSld>
+    <p:spTree>
+      <p:nvGrpSpPr>
+        <p:cNvPr id="1" name=""/>
+        <p:cNvGrpSpPr/>
+        <p:nvPr/>
+      </p:nvGrpSpPr>
+      <p:grpSpPr/>
+      <p:sp>
+        <p:nvSpPr>
+          <p:cNvPr id="2" name="TextBox 1"/>
+          <p:cNvSpPr txBox="1"/>
+          <p:nvPr/>
+        </p:nvSpPr>
+        <p:spPr>
+          <a:xfrm>
+            <a:off x="457200" y="320040"/>
+            <a:ext cx="8229600" cy="822960"/>
+          </a:xfrm>
+          <a:prstGeom prst="rect">
+            <a:avLst/>
+          </a:prstGeom>
+          <a:noFill/>
+        </p:spPr>
+        <p:txBody>
+          <a:bodyPr wrap="square">
+            <a:spAutoFit/>
+          </a:bodyPr>
+          <a:lstStyle/>
+          <a:p>
+            <a:r>
+              <a:rPr sz="2600" b="1">
+                <a:solidFill>
+                  <a:srgbClr val="0B3D2E"/>
+                </a:solidFill>
+              </a:rPr>
+              <a:t>🔗 Referencias</a:t>
+            </a:r>
+          </a:p>
+        </p:txBody>
+      </p:sp>
+      <p:sp>
+        <p:nvSpPr>
+          <p:cNvPr id="3" name="TextBox 2"/>
+          <p:cNvSpPr txBox="1"/>
+          <p:nvPr/>
+        </p:nvSpPr>
+        <p:spPr>
+          <a:xfrm>
+            <a:off x="457200" y="1280160"/>
+            <a:ext cx="8229600" cy="4937760"/>
+          </a:xfrm>
+          <a:prstGeom prst="rect">
+            <a:avLst/>
+          </a:prstGeom>
+          <a:noFill/>
+        </p:spPr>
+        <p:txBody>
+          <a:bodyPr wrap="square">
+            <a:spAutoFit/>
+          </a:bodyPr>
+          <a:lstStyle/>
+          <a:p>
+            <a:pPr>
+              <a:spcAft>
+                <a:spcPts val="600"/>
+              </a:spcAft>
+            </a:pPr>
+            <a:r>
+              <a:rPr sz="1500">
+                <a:solidFill>
+                  <a:srgbClr val="22282E"/>
+                </a:solidFill>
+              </a:rPr>
               <a:t>•  Unicorn Engine. &lt;https://www.unicorn-engine.org&gt;</a:t>
             </a:r>
           </a:p>
@@ -3554,6 +3825,81 @@
           </a:p>
         </p:txBody>
       </p:sp>
+    </p:spTree>
+  </p:cSld>
+  <p:clrMapOvr>
+    <a:masterClrMapping/>
+  </p:clrMapOvr>
+</p:sld>
+</file>
+
+<file path=ppt/slides/slide15.xml><?xml version="1.0" encoding="utf-8"?>
+<p:sld xmlns:a="http://schemas.openxmlformats.org/drawingml/2006/main" xmlns:p="http://schemas.openxmlformats.org/presentationml/2006/main" xmlns:r="http://schemas.openxmlformats.org/officeDocument/2006/relationships">
+  <p:cSld>
+    <p:spTree>
+      <p:nvGrpSpPr>
+        <p:cNvPr id="1" name=""/>
+        <p:cNvGrpSpPr/>
+        <p:nvPr/>
+      </p:nvGrpSpPr>
+      <p:grpSpPr/>
+      <p:sp>
+        <p:nvSpPr>
+          <p:cNvPr id="2" name="TextBox 1"/>
+          <p:cNvSpPr txBox="1"/>
+          <p:nvPr/>
+        </p:nvSpPr>
+        <p:spPr>
+          <a:xfrm>
+            <a:off x="457200" y="274320"/>
+            <a:ext cx="8229600" cy="640080"/>
+          </a:xfrm>
+          <a:prstGeom prst="rect">
+            <a:avLst/>
+          </a:prstGeom>
+          <a:noFill/>
+        </p:spPr>
+        <p:txBody>
+          <a:bodyPr wrap="square">
+            <a:spAutoFit/>
+          </a:bodyPr>
+          <a:lstStyle/>
+          <a:p>
+            <a:r>
+              <a:rPr sz="2200" b="1">
+                <a:solidFill>
+                  <a:srgbClr val="0B3D2E"/>
+                </a:solidFill>
+              </a:rPr>
+              <a:t>Diagrama de la clase</a:t>
+            </a:r>
+          </a:p>
+        </p:txBody>
+      </p:sp>
+      <p:pic>
+        <p:nvPicPr>
+          <p:cNvPr id="3" name="Picture 2" descr="fd5740001af82cf6.png"/>
+          <p:cNvPicPr>
+            <a:picLocks noChangeAspect="1"/>
+          </p:cNvPicPr>
+          <p:nvPr/>
+        </p:nvPicPr>
+        <p:blipFill>
+          <a:blip r:embed="rId2"/>
+          <a:stretch>
+            <a:fillRect/>
+          </a:stretch>
+        </p:blipFill>
+        <p:spPr>
+          <a:xfrm>
+            <a:off x="950476" y="1097280"/>
+            <a:ext cx="7243047" cy="5303520"/>
+          </a:xfrm>
+          <a:prstGeom prst="rect">
+            <a:avLst/>
+          </a:prstGeom>
+        </p:spPr>
+      </p:pic>
     </p:spTree>
   </p:cSld>
   <p:clrMapOvr>
@@ -3638,7 +3984,7 @@
                   <a:srgbClr val="22282E"/>
                 </a:solidFill>
               </a:rPr>
-              <a:t>•  Escalar el análisis con emulación de CPU y automatización del unpacking y la extracción de configuración. El alumno aprenderá a usar frameworks de emulación (Unicorn, Qiling) y de análisis programático (Speakeasy, dumpulator) para desempacar sin depurar a mano, resolver API hashing, ejecutar rutinas de descifrado aisladas y construir extractores de config reutilizables.</a:t>
+              <a:t>•  Escalar el análisis con emulación de CPU y automatización del unpacking y la extracción de configuración. El alumno aprenderá a usar frameworks de emulación (Unicorn, Qiling) y de análisis…</a:t>
             </a:r>
           </a:p>
         </p:txBody>
@@ -4032,7 +4378,7 @@
                   <a:srgbClr val="0B3D2E"/>
                 </a:solidFill>
               </a:rPr>
-              <a:t>📖 Definiciones y características</a:t>
+              <a:t>🧠 Explicación en profundidad</a:t>
             </a:r>
           </a:p>
         </p:txBody>
@@ -4070,67 +4416,97 @@
                   <a:srgbClr val="22282E"/>
                 </a:solidFill>
               </a:rPr>
-              <a:t>•  Emulación: ejecutar instrucciones en un motor software, no en la CPU real. Característica clave: control total y aislamiento.</a:t>
-            </a:r>
-          </a:p>
-          <a:p>
-            <a:pPr>
-              <a:spcAft>
-                <a:spcPts val="600"/>
-              </a:spcAft>
-            </a:pPr>
-            <a:r>
-              <a:rPr sz="1500">
-                <a:solidFill>
-                  <a:srgbClr val="22282E"/>
-                </a:solidFill>
-              </a:rPr>
-              <a:t>•  Unicorn Engine: emulador de CPU multiarquitectura. Característica clave: emula código, no el SO.</a:t>
-            </a:r>
-          </a:p>
-          <a:p>
-            <a:pPr>
-              <a:spcAft>
-                <a:spcPts val="600"/>
-              </a:spcAft>
-            </a:pPr>
-            <a:r>
-              <a:rPr sz="1500">
-                <a:solidFill>
-                  <a:srgbClr val="22282E"/>
-                </a:solidFill>
-              </a:rPr>
-              <a:t>•  Qiling: framework de emulación con soporte de SO/syscalls. Característica clave: ejecuta binarios enteros de forma controlada.</a:t>
-            </a:r>
-          </a:p>
-          <a:p>
-            <a:pPr>
-              <a:spcAft>
-                <a:spcPts val="600"/>
-              </a:spcAft>
-            </a:pPr>
-            <a:r>
-              <a:rPr sz="1500">
-                <a:solidFill>
-                  <a:srgbClr val="22282E"/>
-                </a:solidFill>
-              </a:rPr>
-              <a:t>•  Config extractor: script que extrae la configuración de una familia. Característica clave: repetible y a escala.</a:t>
-            </a:r>
-          </a:p>
-          <a:p>
-            <a:pPr>
-              <a:spcAft>
-                <a:spcPts val="600"/>
-              </a:spcAft>
-            </a:pPr>
-            <a:r>
-              <a:rPr sz="1500">
-                <a:solidFill>
-                  <a:srgbClr val="22282E"/>
-                </a:solidFill>
-              </a:rPr>
-              <a:t>•  API hashing: resolver APIs por hash. Característica clave: resoluble por emulación del algoritmo.</a:t>
+              <a:t>•  Analizar malware a mano —desempaquetar en un depurador, resolver APIs por hash una a una, extraer la</a:t>
+            </a:r>
+          </a:p>
+          <a:p>
+            <a:pPr>
+              <a:spcAft>
+                <a:spcPts val="600"/>
+              </a:spcAft>
+            </a:pPr>
+            <a:r>
+              <a:rPr sz="1500">
+                <a:solidFill>
+                  <a:srgbClr val="22282E"/>
+                </a:solidFill>
+              </a:rPr>
+              <a:t>•  config manualmente— no escala cuando hay que triar cientos de muestras al día. La emulación resuelve</a:t>
+            </a:r>
+          </a:p>
+          <a:p>
+            <a:pPr>
+              <a:spcAft>
+                <a:spcPts val="600"/>
+              </a:spcAft>
+            </a:pPr>
+            <a:r>
+              <a:rPr sz="1500">
+                <a:solidFill>
+                  <a:srgbClr val="22282E"/>
+                </a:solidFill>
+              </a:rPr>
+              <a:t>•  esto: ejecutar el código del malware en un entorno simulado y controlado que no es ni una ejecución</a:t>
+            </a:r>
+          </a:p>
+          <a:p>
+            <a:pPr>
+              <a:spcAft>
+                <a:spcPts val="600"/>
+              </a:spcAft>
+            </a:pPr>
+            <a:r>
+              <a:rPr sz="1500">
+                <a:solidFill>
+                  <a:srgbClr val="22282E"/>
+                </a:solidFill>
+              </a:rPr>
+              <a:t>•  real (peligrosa, requiere el SO y hardware exactos) ni una depuración manual (lenta), sino algo intermedio</a:t>
+            </a:r>
+          </a:p>
+          <a:p>
+            <a:pPr>
+              <a:spcAft>
+                <a:spcPts val="600"/>
+              </a:spcAft>
+            </a:pPr>
+            <a:r>
+              <a:rPr sz="1500">
+                <a:solidFill>
+                  <a:srgbClr val="22282E"/>
+                </a:solidFill>
+              </a:rPr>
+              <a:t>•  —se corre el código instrucción a instrucción en un CPU virtual, con control total y sin riesgo—. La</a:t>
+            </a:r>
+          </a:p>
+          <a:p>
+            <a:pPr>
+              <a:spcAft>
+                <a:spcPts val="600"/>
+              </a:spcAft>
+            </a:pPr>
+            <a:r>
+              <a:rPr sz="1500">
+                <a:solidFill>
+                  <a:srgbClr val="22282E"/>
+                </a:solidFill>
+              </a:rPr>
+              <a:t>•  emulación es la clave de la automatización del análisis: unpacking, resolución de API hashing y</a:t>
+            </a:r>
+          </a:p>
+          <a:p>
+            <a:pPr>
+              <a:spcAft>
+                <a:spcPts val="600"/>
+              </a:spcAft>
+            </a:pPr>
+            <a:r>
+              <a:rPr sz="1500">
+                <a:solidFill>
+                  <a:srgbClr val="22282E"/>
+                </a:solidFill>
+              </a:rPr>
+              <a:t>•  extracción de configuración que a mano llevarían horas se hacen programáticamente en segundos.</a:t>
             </a:r>
           </a:p>
         </p:txBody>
@@ -4181,7 +4557,7 @@
                   <a:srgbClr val="0B3D2E"/>
                 </a:solidFill>
               </a:rPr>
-              <a:t>🧰 Herramientas y preparación</a:t>
+              <a:t>📖 Definiciones y características</a:t>
             </a:r>
           </a:p>
         </p:txBody>
@@ -4219,52 +4595,67 @@
                   <a:srgbClr val="22282E"/>
                 </a:solidFill>
               </a:rPr>
-              <a:t>•  Unicorn Engine (+ Capstone/Keystone) y Qiling Framework.</a:t>
-            </a:r>
-          </a:p>
-          <a:p>
-            <a:pPr>
-              <a:spcAft>
-                <a:spcPts val="600"/>
-              </a:spcAft>
-            </a:pPr>
-            <a:r>
-              <a:rPr sz="1500">
-                <a:solidFill>
-                  <a:srgbClr val="22282E"/>
-                </a:solidFill>
-              </a:rPr>
-              <a:t>•  Speakeasy (Mandiant) y dumpulator para emulación de malware.</a:t>
-            </a:r>
-          </a:p>
-          <a:p>
-            <a:pPr>
-              <a:spcAft>
-                <a:spcPts val="600"/>
-              </a:spcAft>
-            </a:pPr>
-            <a:r>
-              <a:rPr sz="1500">
-                <a:solidFill>
-                  <a:srgbClr val="22282E"/>
-                </a:solidFill>
-              </a:rPr>
-              <a:t>•  FLOSS/capa para localizar rutinas objetivo.</a:t>
-            </a:r>
-          </a:p>
-          <a:p>
-            <a:pPr>
-              <a:spcAft>
-                <a:spcPts val="600"/>
-              </a:spcAft>
-            </a:pPr>
-            <a:r>
-              <a:rPr sz="1500">
-                <a:solidFill>
-                  <a:srgbClr val="22282E"/>
-                </a:solidFill>
-              </a:rPr>
-              <a:t>•  Python en la VM aislada para orquestar.</a:t>
+              <a:t>•  Emulación: ejecutar instrucciones en un motor software, no en la CPU real. Característica clave: control total y aislamiento.</a:t>
+            </a:r>
+          </a:p>
+          <a:p>
+            <a:pPr>
+              <a:spcAft>
+                <a:spcPts val="600"/>
+              </a:spcAft>
+            </a:pPr>
+            <a:r>
+              <a:rPr sz="1500">
+                <a:solidFill>
+                  <a:srgbClr val="22282E"/>
+                </a:solidFill>
+              </a:rPr>
+              <a:t>•  Unicorn Engine: emulador de CPU multiarquitectura. Característica clave: emula código, no el SO.</a:t>
+            </a:r>
+          </a:p>
+          <a:p>
+            <a:pPr>
+              <a:spcAft>
+                <a:spcPts val="600"/>
+              </a:spcAft>
+            </a:pPr>
+            <a:r>
+              <a:rPr sz="1500">
+                <a:solidFill>
+                  <a:srgbClr val="22282E"/>
+                </a:solidFill>
+              </a:rPr>
+              <a:t>•  Qiling: framework de emulación con soporte de SO/syscalls. Característica clave: ejecuta binarios enteros de forma controlada.</a:t>
+            </a:r>
+          </a:p>
+          <a:p>
+            <a:pPr>
+              <a:spcAft>
+                <a:spcPts val="600"/>
+              </a:spcAft>
+            </a:pPr>
+            <a:r>
+              <a:rPr sz="1500">
+                <a:solidFill>
+                  <a:srgbClr val="22282E"/>
+                </a:solidFill>
+              </a:rPr>
+              <a:t>•  Config extractor: script que extrae la configuración de una familia. Característica clave: repetible y a escala.</a:t>
+            </a:r>
+          </a:p>
+          <a:p>
+            <a:pPr>
+              <a:spcAft>
+                <a:spcPts val="600"/>
+              </a:spcAft>
+            </a:pPr>
+            <a:r>
+              <a:rPr sz="1500">
+                <a:solidFill>
+                  <a:srgbClr val="22282E"/>
+                </a:solidFill>
+              </a:rPr>
+              <a:t>•  API hashing: resolver APIs por hash. Característica clave: resoluble por emulación del algoritmo.</a:t>
             </a:r>
           </a:p>
         </p:txBody>
@@ -4315,7 +4706,7 @@
                   <a:srgbClr val="0B3D2E"/>
                 </a:solidFill>
               </a:rPr>
-              <a:t>🧪 Laboratorio guiado</a:t>
+              <a:t>📔 Glosario</a:t>
             </a:r>
           </a:p>
         </p:txBody>
@@ -4353,97 +4744,97 @@
                   <a:srgbClr val="22282E"/>
                 </a:solidFill>
               </a:rPr>
-              <a:t>•  Con capa/FLOSS localiza en una muestra la rutina de descifrado de config o de API hashing (dirección de inicio y fin).</a:t>
-            </a:r>
-          </a:p>
-          <a:p>
-            <a:pPr>
-              <a:spcAft>
-                <a:spcPts val="600"/>
-              </a:spcAft>
-            </a:pPr>
-            <a:r>
-              <a:rPr sz="1500">
-                <a:solidFill>
-                  <a:srgbClr val="22282E"/>
-                </a:solidFill>
-              </a:rPr>
-              <a:t>•  Emula solo esa función con Unicorn: mapea memoria, carga los bytes del binario, fija registros/argumentos y ejecuta hasta la dirección final. Lee el buffer de salida (config descifrada).</a:t>
-            </a:r>
-          </a:p>
-          <a:p>
-            <a:pPr>
-              <a:spcAft>
-                <a:spcPts val="600"/>
-              </a:spcAft>
-            </a:pPr>
-            <a:r>
-              <a:rPr sz="1500">
-                <a:solidFill>
-                  <a:srgbClr val="22282E"/>
-                </a:solidFill>
-              </a:rPr>
-              <a:t>•  from unicorn import</a:t>
-            </a:r>
-          </a:p>
-          <a:p>
-            <a:pPr>
-              <a:spcAft>
-                <a:spcPts val="600"/>
-              </a:spcAft>
-            </a:pPr>
-            <a:r>
-              <a:rPr sz="1500">
-                <a:solidFill>
-                  <a:srgbClr val="22282E"/>
-                </a:solidFill>
-              </a:rPr>
-              <a:t>•  from unicorn.x86const import</a:t>
-            </a:r>
-          </a:p>
-          <a:p>
-            <a:pPr>
-              <a:spcAft>
-                <a:spcPts val="600"/>
-              </a:spcAft>
-            </a:pPr>
-            <a:r>
-              <a:rPr sz="1500">
-                <a:solidFill>
-                  <a:srgbClr val="22282E"/>
-                </a:solidFill>
-              </a:rPr>
-              <a:t>•  mu = Uc(UCARCHX86, UCMODE32)</a:t>
-            </a:r>
-          </a:p>
-          <a:p>
-            <a:pPr>
-              <a:spcAft>
-                <a:spcPts val="600"/>
-              </a:spcAft>
-            </a:pPr>
-            <a:r>
-              <a:rPr sz="1500">
-                <a:solidFill>
-                  <a:srgbClr val="22282E"/>
-                </a:solidFill>
-              </a:rPr>
-              <a:t>•  mu.memmap(0x400000, 0x100000)</a:t>
-            </a:r>
-          </a:p>
-          <a:p>
-            <a:pPr>
-              <a:spcAft>
-                <a:spcPts val="600"/>
-              </a:spcAft>
-            </a:pPr>
-            <a:r>
-              <a:rPr sz="1500">
-                <a:solidFill>
-                  <a:srgbClr val="22282E"/>
-                </a:solidFill>
-              </a:rPr>
-              <a:t>•  mu.memwrite(0x401000, codebytes)</a:t>
+              <a:t>•  Término — Definición concisa</a:t>
+            </a:r>
+          </a:p>
+          <a:p>
+            <a:pPr>
+              <a:spcAft>
+                <a:spcPts val="600"/>
+              </a:spcAft>
+            </a:pPr>
+            <a:r>
+              <a:rPr sz="1500">
+                <a:solidFill>
+                  <a:srgbClr val="22282E"/>
+                </a:solidFill>
+              </a:rPr>
+              <a:t>•  Emulación — Ejecutar código en un CPU virtual, con control y sin riesgo</a:t>
+            </a:r>
+          </a:p>
+          <a:p>
+            <a:pPr>
+              <a:spcAft>
+                <a:spcPts val="600"/>
+              </a:spcAft>
+            </a:pPr>
+            <a:r>
+              <a:rPr sz="1500">
+                <a:solidFill>
+                  <a:srgbClr val="22282E"/>
+                </a:solidFill>
+              </a:rPr>
+              <a:t>•  Emulación vs ejecución vs depuración — Simulada vs real vs manual</a:t>
+            </a:r>
+          </a:p>
+          <a:p>
+            <a:pPr>
+              <a:spcAft>
+                <a:spcPts val="600"/>
+              </a:spcAft>
+            </a:pPr>
+            <a:r>
+              <a:rPr sz="1500">
+                <a:solidFill>
+                  <a:srgbClr val="22282E"/>
+                </a:solidFill>
+              </a:rPr>
+              <a:t>•  Unicorn Engine — Emula solo la CPU; ideal para fragmentos</a:t>
+            </a:r>
+          </a:p>
+          <a:p>
+            <a:pPr>
+              <a:spcAft>
+                <a:spcPts val="600"/>
+              </a:spcAft>
+            </a:pPr>
+            <a:r>
+              <a:rPr sz="1500">
+                <a:solidFill>
+                  <a:srgbClr val="22282E"/>
+                </a:solidFill>
+              </a:rPr>
+              <a:t>•  Qiling — Emula CPU y SO; ejecuta binarios completos</a:t>
+            </a:r>
+          </a:p>
+          <a:p>
+            <a:pPr>
+              <a:spcAft>
+                <a:spcPts val="600"/>
+              </a:spcAft>
+            </a:pPr>
+            <a:r>
+              <a:rPr sz="1500">
+                <a:solidFill>
+                  <a:srgbClr val="22282E"/>
+                </a:solidFill>
+              </a:rPr>
+              <a:t>•  Speakeasy / dumpulator — Emuladores especializados en malware de Windows</a:t>
+            </a:r>
+          </a:p>
+          <a:p>
+            <a:pPr>
+              <a:spcAft>
+                <a:spcPts val="600"/>
+              </a:spcAft>
+            </a:pPr>
+            <a:r>
+              <a:rPr sz="1500">
+                <a:solidFill>
+                  <a:srgbClr val="22282E"/>
+                </a:solidFill>
+              </a:rPr>
+              <a:t>•  Emular un fragmento — Ejecutar una rutina aislada (descifrado, DGA)</a:t>
             </a:r>
           </a:p>
         </p:txBody>
@@ -4494,7 +4885,7 @@
                   <a:srgbClr val="0B3D2E"/>
                 </a:solidFill>
               </a:rPr>
-              <a:t>✍️ Ejercicios</a:t>
+              <a:t>🧰 Herramientas y preparación</a:t>
             </a:r>
           </a:p>
         </p:txBody>
@@ -4532,82 +4923,52 @@
                   <a:srgbClr val="22282E"/>
                 </a:solidFill>
               </a:rPr>
-              <a:t>•  Explica cuándo prefieres emular una función en vez de depurar la muestra.</a:t>
-            </a:r>
-          </a:p>
-          <a:p>
-            <a:pPr>
-              <a:spcAft>
-                <a:spcPts val="600"/>
-              </a:spcAft>
-            </a:pPr>
-            <a:r>
-              <a:rPr sz="1500">
-                <a:solidFill>
-                  <a:srgbClr val="22282E"/>
-                </a:solidFill>
-              </a:rPr>
-              <a:t>•  Emula una rutina XOR con Unicorn y recupera su salida.</a:t>
-            </a:r>
-          </a:p>
-          <a:p>
-            <a:pPr>
-              <a:spcAft>
-                <a:spcPts val="600"/>
-              </a:spcAft>
-            </a:pPr>
-            <a:r>
-              <a:rPr sz="1500">
-                <a:solidFill>
-                  <a:srgbClr val="22282E"/>
-                </a:solidFill>
-              </a:rPr>
-              <a:t>•  Resuelve API hashing precomputando hashes de APIs comunes.</a:t>
-            </a:r>
-          </a:p>
-          <a:p>
-            <a:pPr>
-              <a:spcAft>
-                <a:spcPts val="600"/>
-              </a:spcAft>
-            </a:pPr>
-            <a:r>
-              <a:rPr sz="1500">
-                <a:solidFill>
-                  <a:srgbClr val="22282E"/>
-                </a:solidFill>
-              </a:rPr>
-              <a:t>•  Usa Qiling/Speakeasy para capturar las APIs de un unpacker.</a:t>
-            </a:r>
-          </a:p>
-          <a:p>
-            <a:pPr>
-              <a:spcAft>
-                <a:spcPts val="600"/>
-              </a:spcAft>
-            </a:pPr>
-            <a:r>
-              <a:rPr sz="1500">
-                <a:solidFill>
-                  <a:srgbClr val="22282E"/>
-                </a:solidFill>
-              </a:rPr>
-              <a:t>•  Escribe un extractor de config que devuelva JSON.</a:t>
-            </a:r>
-          </a:p>
-          <a:p>
-            <a:pPr>
-              <a:spcAft>
-                <a:spcPts val="600"/>
-              </a:spcAft>
-            </a:pPr>
-            <a:r>
-              <a:rPr sz="1500">
-                <a:solidFill>
-                  <a:srgbClr val="22282E"/>
-                </a:solidFill>
-              </a:rPr>
-              <a:t>•  Integra el extractor en un mini-pipeline de triaje por lotes.</a:t>
+              <a:t>•  Unicorn Engine (+ Capstone/Keystone) y Qiling Framework.</a:t>
+            </a:r>
+          </a:p>
+          <a:p>
+            <a:pPr>
+              <a:spcAft>
+                <a:spcPts val="600"/>
+              </a:spcAft>
+            </a:pPr>
+            <a:r>
+              <a:rPr sz="1500">
+                <a:solidFill>
+                  <a:srgbClr val="22282E"/>
+                </a:solidFill>
+              </a:rPr>
+              <a:t>•  Speakeasy (Mandiant) y dumpulator para emulación de malware.</a:t>
+            </a:r>
+          </a:p>
+          <a:p>
+            <a:pPr>
+              <a:spcAft>
+                <a:spcPts val="600"/>
+              </a:spcAft>
+            </a:pPr>
+            <a:r>
+              <a:rPr sz="1500">
+                <a:solidFill>
+                  <a:srgbClr val="22282E"/>
+                </a:solidFill>
+              </a:rPr>
+              <a:t>•  FLOSS/capa para localizar rutinas objetivo.</a:t>
+            </a:r>
+          </a:p>
+          <a:p>
+            <a:pPr>
+              <a:spcAft>
+                <a:spcPts val="600"/>
+              </a:spcAft>
+            </a:pPr>
+            <a:r>
+              <a:rPr sz="1500">
+                <a:solidFill>
+                  <a:srgbClr val="22282E"/>
+                </a:solidFill>
+              </a:rPr>
+              <a:t>•  Python en la VM aislada para orquestar.</a:t>
             </a:r>
           </a:p>
         </p:txBody>
@@ -4658,7 +5019,7 @@
                   <a:srgbClr val="0B3D2E"/>
                 </a:solidFill>
               </a:rPr>
-              <a:t>📝 Reto verificable</a:t>
+              <a:t>🧪 Laboratorio guiado</a:t>
             </a:r>
           </a:p>
         </p:txBody>
@@ -4696,22 +5057,82 @@
                   <a:srgbClr val="22282E"/>
                 </a:solidFill>
               </a:rPr>
-              <a:t>•  Entrega un extractor de configuración para una familia que, por emulación, recupere la config (dominios/clave/intervalo) de al menos 3 muestras distintas de esa familia, con salida en JSON.</a:t>
-            </a:r>
-          </a:p>
-          <a:p>
-            <a:pPr>
-              <a:spcAft>
-                <a:spcPts val="600"/>
-              </a:spcAft>
-            </a:pPr>
-            <a:r>
-              <a:rPr sz="1500">
-                <a:solidFill>
-                  <a:srgbClr val="22282E"/>
-                </a:solidFill>
-              </a:rPr>
-              <a:t>•  Criterio de aceptación: el script corre sin depuración manual y produce la config correcta para 3+ muestras de la familia, verificable contra el análisis manual de una de ellas.</a:t>
+              <a:t>•  Con capa/FLOSS localiza en una muestra la rutina de descifrado de config o de API hashing (dirección de inicio y fin).</a:t>
+            </a:r>
+          </a:p>
+          <a:p>
+            <a:pPr>
+              <a:spcAft>
+                <a:spcPts val="600"/>
+              </a:spcAft>
+            </a:pPr>
+            <a:r>
+              <a:rPr sz="1500">
+                <a:solidFill>
+                  <a:srgbClr val="22282E"/>
+                </a:solidFill>
+              </a:rPr>
+              <a:t>•  Emula solo esa función con Unicorn: mapea memoria, carga los bytes del binario, fija registros/argumentos y ejecuta hasta la dirección final. Lee el buffer de salida (config descifrada).</a:t>
+            </a:r>
+          </a:p>
+          <a:p>
+            <a:pPr>
+              <a:spcAft>
+                <a:spcPts val="600"/>
+              </a:spcAft>
+            </a:pPr>
+            <a:r>
+              <a:rPr sz="1500">
+                <a:solidFill>
+                  <a:srgbClr val="22282E"/>
+                </a:solidFill>
+              </a:rPr>
+              <a:t>•  Para API hashing, emula el algoritmo de hash y precomputa los hashes de APIs comunes; construye un mapa hash→nombre y anota el desensamblado.</a:t>
+            </a:r>
+          </a:p>
+          <a:p>
+            <a:pPr>
+              <a:spcAft>
+                <a:spcPts val="600"/>
+              </a:spcAft>
+            </a:pPr>
+            <a:r>
+              <a:rPr sz="1500">
+                <a:solidFill>
+                  <a:srgbClr val="22282E"/>
+                </a:solidFill>
+              </a:rPr>
+              <a:t>•  Usa Qiling o Speakeasy para emular la muestra completa y capturar las llamadas a APIs (VirtualAlloc, WriteProcessMemory) que revelan el payload desempacado; vuelca la región.</a:t>
+            </a:r>
+          </a:p>
+          <a:p>
+            <a:pPr>
+              <a:spcAft>
+                <a:spcPts val="600"/>
+              </a:spcAft>
+            </a:pPr>
+            <a:r>
+              <a:rPr sz="1500">
+                <a:solidFill>
+                  <a:srgbClr val="22282E"/>
+                </a:solidFill>
+              </a:rPr>
+              <a:t>•  Empaqueta lo anterior en un extractor de config: recibe una muestra de la familia y devuelve dominios/claves/intervalos en JSON.</a:t>
+            </a:r>
+          </a:p>
+          <a:p>
+            <a:pPr>
+              <a:spcAft>
+                <a:spcPts val="600"/>
+              </a:spcAft>
+            </a:pPr>
+            <a:r>
+              <a:rPr sz="1500">
+                <a:solidFill>
+                  <a:srgbClr val="22282E"/>
+                </a:solidFill>
+              </a:rPr>
+              <a:t>•  Prueba el extractor contra varias muestras de la familia y mide su tasa de éxito.</a:t>
             </a:r>
           </a:p>
         </p:txBody>
